--- a/markdown/files/slides/lecture21_concurrency3_amdahls.pptx
+++ b/markdown/files/slides/lecture21_concurrency3_amdahls.pptx
@@ -4637,15 +4637,15 @@
             </a:br>
             <a:r>
               <a:rPr lang="en-US" dirty="0"/>
-              <a:t>Lecture 21: Concurrency 3 and </a:t>
-            </a:r>
-            <a:r>
-              <a:rPr lang="en-US" dirty="0" err="1"/>
-              <a:t>Amdahls</a:t>
-            </a:r>
-            <a:r>
-              <a:rPr lang="en-US" dirty="0"/>
-              <a:t> Law</a:t>
+              <a:t>Lecture 21: Concurrency 3 </a:t>
+            </a:r>
+            <a:r>
+              <a:rPr lang="en-US"/>
+              <a:t>and Amdahl’s </a:t>
+            </a:r>
+            <a:r>
+              <a:rPr lang="en-US" dirty="0"/>
+              <a:t>Law</a:t>
             </a:r>
           </a:p>
         </p:txBody>
